--- a/30_ETF_Construction_Management/presentations/etf-public-kweb-2026-stress-fund-memo.pptx
+++ b/30_ETF_Construction_Management/presentations/etf-public-kweb-2026-stress-fund-memo.pptx
@@ -3424,7 +3424,7 @@
                 </a:solidFill>
                 <a:latin typeface="Calibri"/>
               </a:rPr>
-              <a:t>Real, sourced: 30 disclosed holdings by weight and 7 sector weights are the fund's own SEC Form N-CSR annual shareholder report — including a sector table that sums to 102.6%, not smoothed to 100% (a real disclosure artifact from securities-lending collateral, see validation.md Finding ETF-03).</a:t>
+              <a:t>Real, sourced: 30 disclosed holdings by weight, 7 sector weights, and the fund's own 'other assets less liabilities' balancing line are all from its SEC Form N-CSR annual shareholder report — nothing is smoothed (see validation.md Finding ETF-03).</a:t>
             </a:r>
           </a:p>
           <a:p>
@@ -3491,7 +3491,7 @@
                 </a:solidFill>
                 <a:latin typeface="Calibri"/>
               </a:rPr>
-              <a:t>Model checks: Overall REVIEW  ·  standards/public_cases/etf-public-kweb-2026-stress.json</a:t>
+              <a:t>Model checks: Overall PASS  ·  standards/public_cases/etf-public-kweb-2026-stress.json</a:t>
             </a:r>
           </a:p>
         </p:txBody>
@@ -5072,7 +5072,7 @@
                 <a:gridCol w="4572000"/>
                 <a:gridCol w="1828800"/>
               </a:tblGrid>
-              <a:tr h="388620">
+              <a:tr h="345440">
                 <a:tc>
                   <a:txBody>
                     <a:bodyPr/>
@@ -5120,7 +5120,7 @@
                   </a:tcPr>
                 </a:tc>
               </a:tr>
-              <a:tr h="388620">
+              <a:tr h="345440">
                 <a:tc>
                   <a:txBody>
                     <a:bodyPr/>
@@ -5168,7 +5168,7 @@
                   </a:tcPr>
                 </a:tc>
               </a:tr>
-              <a:tr h="388620">
+              <a:tr h="345440">
                 <a:tc>
                   <a:txBody>
                     <a:bodyPr/>
@@ -5216,7 +5216,7 @@
                   </a:tcPr>
                 </a:tc>
               </a:tr>
-              <a:tr h="388620">
+              <a:tr h="345440">
                 <a:tc>
                   <a:txBody>
                     <a:bodyPr/>
@@ -5264,7 +5264,7 @@
                   </a:tcPr>
                 </a:tc>
               </a:tr>
-              <a:tr h="388620">
+              <a:tr h="345440">
                 <a:tc>
                   <a:txBody>
                     <a:bodyPr/>
@@ -5312,7 +5312,7 @@
                   </a:tcPr>
                 </a:tc>
               </a:tr>
-              <a:tr h="388620">
+              <a:tr h="345440">
                 <a:tc>
                   <a:txBody>
                     <a:bodyPr/>
@@ -5360,7 +5360,7 @@
                   </a:tcPr>
                 </a:tc>
               </a:tr>
-              <a:tr h="388620">
+              <a:tr h="345440">
                 <a:tc>
                   <a:txBody>
                     <a:bodyPr/>
@@ -5408,7 +5408,7 @@
                   </a:tcPr>
                 </a:tc>
               </a:tr>
-              <a:tr h="388620">
+              <a:tr h="345440">
                 <a:tc>
                   <a:txBody>
                     <a:bodyPr/>
@@ -5456,6 +5456,54 @@
                   </a:tcPr>
                 </a:tc>
               </a:tr>
+              <a:tr h="345440">
+                <a:tc>
+                  <a:txBody>
+                    <a:bodyPr/>
+                    <a:lstStyle/>
+                    <a:p>
+                      <a:pPr algn="l"/>
+                      <a:r>
+                        <a:rPr sz="1100">
+                          <a:solidFill>
+                            <a:srgbClr val="222733"/>
+                          </a:solidFill>
+                          <a:latin typeface="Calibri"/>
+                        </a:rPr>
+                        <a:t>OTHER ASSETS LESS LIABILITIES</a:t>
+                      </a:r>
+                    </a:p>
+                  </a:txBody>
+                  <a:tcPr>
+                    <a:solidFill>
+                      <a:srgbClr val="F4F6FC"/>
+                    </a:solidFill>
+                  </a:tcPr>
+                </a:tc>
+                <a:tc>
+                  <a:txBody>
+                    <a:bodyPr/>
+                    <a:lstStyle/>
+                    <a:p>
+                      <a:pPr algn="r"/>
+                      <a:r>
+                        <a:rPr sz="1100">
+                          <a:solidFill>
+                            <a:srgbClr val="222733"/>
+                          </a:solidFill>
+                          <a:latin typeface="Calibri"/>
+                        </a:rPr>
+                        <a:t>-2.6%</a:t>
+                      </a:r>
+                    </a:p>
+                  </a:txBody>
+                  <a:tcPr>
+                    <a:solidFill>
+                      <a:srgbClr val="F4F6FC"/>
+                    </a:solidFill>
+                  </a:tcPr>
+                </a:tc>
+              </a:tr>
             </a:tbl>
           </a:graphicData>
         </a:graphic>
@@ -5490,7 +5538,7 @@
                 </a:solidFill>
                 <a:latin typeface="Calibri"/>
               </a:rPr>
-              <a:t>Sector weights sum to 102.6%, not 100% — the fund's own N-CSR disclosure, most likely reflecting securities-lending collateral counted alongside its originating sector.</a:t>
+              <a:t>Composition reconciles to 100.0% of net assets. The filing's sector weights cover investments only (102.6%); its disclosed 'other assets less liabilities' line of (2.6)% is carried here as the balancing item, exactly as the fund reports it.</a:t>
             </a:r>
           </a:p>
         </p:txBody>
@@ -5604,7 +5652,7 @@
                 </a:solidFill>
                 <a:latin typeface="Calibri"/>
               </a:rPr>
-              <a:t>Not corrected or smoothed to 100%: the real, disclosed number is used as-is, which correctly trips this workbook's own sector-weight-band Check to REVIEW rather than PASS.</a:t>
+              <a:t>Nothing is smoothed: every figure above is disclosed, and the grid reconciles because the fund's own balancing line is carried alongside its sector weights rather than dropped.</a:t>
             </a:r>
           </a:p>
         </p:txBody>
@@ -6519,7 +6567,7 @@
                 </a:solidFill>
                 <a:latin typeface="Calibri"/>
               </a:rPr>
-              <a:t>The sector-table disclosure gap (102.6% vs 100%) and the resulting Checks REVIEW are genuine, disclosed imperfections kept in this deck rather than smoothed over.</a:t>
+              <a:t>The composition table carries the fund's own (2.6)% 'other assets less liabilities' line beside its 102.6% of investments — the filing's identity, reproduced rather than rounded.</a:t>
             </a:r>
           </a:p>
           <a:p>
@@ -6570,7 +6618,7 @@
                 </a:solidFill>
                 <a:latin typeface="Calibri"/>
               </a:rPr>
-              <a:t>Model: 30_ETF_Construction_Management/_template_ETF.xlsx  ·  Instance: 30_ETF_Construction_Management/instances/public_kweb_2026_stress.xlsx  ·  Overall checks: REVIEW</a:t>
+              <a:t>Model: 30_ETF_Construction_Management/_template_ETF.xlsx  ·  Instance: 30_ETF_Construction_Management/instances/public_kweb_2026_stress.xlsx  ·  Overall checks: PASS</a:t>
             </a:r>
           </a:p>
         </p:txBody>
